--- a/api/templates/brochure_ru.pptx
+++ b/api/templates/brochure_ru.pptx
@@ -315,7 +315,7 @@
             <a:fld id="{1D8BD707-D9CF-40AE-B4C6-C98DA3205C09}" type="datetimeFigureOut">
               <a:rPr lang="en-US" smtClean="0"/>
               <a:pPr/>
-              <a:t>2/2/2026</a:t>
+              <a:t>6/23/2026</a:t>
             </a:fld>
             <a:endParaRPr lang="en-US"/>
           </a:p>
@@ -480,7 +480,7 @@
             <a:fld id="{1D8BD707-D9CF-40AE-B4C6-C98DA3205C09}" type="datetimeFigureOut">
               <a:rPr lang="en-US" smtClean="0"/>
               <a:pPr/>
-              <a:t>2/2/2026</a:t>
+              <a:t>6/23/2026</a:t>
             </a:fld>
             <a:endParaRPr lang="en-US"/>
           </a:p>
@@ -655,7 +655,7 @@
             <a:fld id="{1D8BD707-D9CF-40AE-B4C6-C98DA3205C09}" type="datetimeFigureOut">
               <a:rPr lang="en-US" smtClean="0"/>
               <a:pPr/>
-              <a:t>2/2/2026</a:t>
+              <a:t>6/23/2026</a:t>
             </a:fld>
             <a:endParaRPr lang="en-US"/>
           </a:p>
@@ -820,7 +820,7 @@
             <a:fld id="{1D8BD707-D9CF-40AE-B4C6-C98DA3205C09}" type="datetimeFigureOut">
               <a:rPr lang="en-US" smtClean="0"/>
               <a:pPr/>
-              <a:t>2/2/2026</a:t>
+              <a:t>6/23/2026</a:t>
             </a:fld>
             <a:endParaRPr lang="en-US"/>
           </a:p>
@@ -1062,7 +1062,7 @@
             <a:fld id="{1D8BD707-D9CF-40AE-B4C6-C98DA3205C09}" type="datetimeFigureOut">
               <a:rPr lang="en-US" smtClean="0"/>
               <a:pPr/>
-              <a:t>2/2/2026</a:t>
+              <a:t>6/23/2026</a:t>
             </a:fld>
             <a:endParaRPr lang="en-US"/>
           </a:p>
@@ -1344,7 +1344,7 @@
             <a:fld id="{1D8BD707-D9CF-40AE-B4C6-C98DA3205C09}" type="datetimeFigureOut">
               <a:rPr lang="en-US" smtClean="0"/>
               <a:pPr/>
-              <a:t>2/2/2026</a:t>
+              <a:t>6/23/2026</a:t>
             </a:fld>
             <a:endParaRPr lang="en-US"/>
           </a:p>
@@ -1760,7 +1760,7 @@
             <a:fld id="{1D8BD707-D9CF-40AE-B4C6-C98DA3205C09}" type="datetimeFigureOut">
               <a:rPr lang="en-US" smtClean="0"/>
               <a:pPr/>
-              <a:t>2/2/2026</a:t>
+              <a:t>6/23/2026</a:t>
             </a:fld>
             <a:endParaRPr lang="en-US"/>
           </a:p>
@@ -1874,7 +1874,7 @@
             <a:fld id="{1D8BD707-D9CF-40AE-B4C6-C98DA3205C09}" type="datetimeFigureOut">
               <a:rPr lang="en-US" smtClean="0"/>
               <a:pPr/>
-              <a:t>2/2/2026</a:t>
+              <a:t>6/23/2026</a:t>
             </a:fld>
             <a:endParaRPr lang="en-US"/>
           </a:p>
@@ -1966,7 +1966,7 @@
             <a:fld id="{1D8BD707-D9CF-40AE-B4C6-C98DA3205C09}" type="datetimeFigureOut">
               <a:rPr lang="en-US" smtClean="0"/>
               <a:pPr/>
-              <a:t>2/2/2026</a:t>
+              <a:t>6/23/2026</a:t>
             </a:fld>
             <a:endParaRPr lang="en-US"/>
           </a:p>
@@ -2238,7 +2238,7 @@
             <a:fld id="{1D8BD707-D9CF-40AE-B4C6-C98DA3205C09}" type="datetimeFigureOut">
               <a:rPr lang="en-US" smtClean="0"/>
               <a:pPr/>
-              <a:t>2/2/2026</a:t>
+              <a:t>6/23/2026</a:t>
             </a:fld>
             <a:endParaRPr lang="en-US"/>
           </a:p>
@@ -2487,7 +2487,7 @@
             <a:fld id="{1D8BD707-D9CF-40AE-B4C6-C98DA3205C09}" type="datetimeFigureOut">
               <a:rPr lang="en-US" smtClean="0"/>
               <a:pPr/>
-              <a:t>2/2/2026</a:t>
+              <a:t>6/23/2026</a:t>
             </a:fld>
             <a:endParaRPr lang="en-US"/>
           </a:p>
@@ -2695,7 +2695,7 @@
             <a:fld id="{1D8BD707-D9CF-40AE-B4C6-C98DA3205C09}" type="datetimeFigureOut">
               <a:rPr lang="en-US" smtClean="0"/>
               <a:pPr/>
-              <a:t>2/2/2026</a:t>
+              <a:t>6/23/2026</a:t>
             </a:fld>
             <a:endParaRPr lang="en-US"/>
           </a:p>
@@ -3655,7 +3655,7 @@
             <p:spPr>
               <a:xfrm>
                 <a:off x="442913" y="1226277"/>
-                <a:ext cx="3628993" cy="890416"/>
+                <a:ext cx="3628993" cy="668132"/>
               </a:xfrm>
               <a:prstGeom prst="rect">
                 <a:avLst/>
@@ -3701,31 +3701,7 @@
                     <a:cs typeface="Circe Bold"/>
                     <a:sym typeface="Circe Bold"/>
                   </a:rPr>
-                  <a:t>На ресепшене можно приобрести экскурсии и получить купон на 10% скидку на тур от City </a:t>
-                </a:r>
-                <a:r>
-                  <a:rPr lang="ru-RU" sz="1109" dirty="0" err="1">
-                    <a:solidFill>
-                      <a:srgbClr val="000000"/>
-                    </a:solidFill>
-                    <a:latin typeface="Circe" panose="020B0502020203020203" pitchFamily="34" charset="-52"/>
-                    <a:ea typeface="Circe Bold"/>
-                    <a:cs typeface="Circe Bold"/>
-                    <a:sym typeface="Circe Bold"/>
-                  </a:rPr>
-                  <a:t>Sightseeing</a:t>
-                </a:r>
-                <a:r>
-                  <a:rPr lang="ru-RU" sz="1109" dirty="0">
-                    <a:solidFill>
-                      <a:srgbClr val="000000"/>
-                    </a:solidFill>
-                    <a:latin typeface="Circe" panose="020B0502020203020203" pitchFamily="34" charset="-52"/>
-                    <a:ea typeface="Circe Bold"/>
-                    <a:cs typeface="Circe Bold"/>
-                    <a:sym typeface="Circe Bold"/>
-                  </a:rPr>
-                  <a:t>.</a:t>
+                  <a:t>На ресепшене можно приобрести экскурсии</a:t>
                 </a:r>
               </a:p>
             </p:txBody>
@@ -4395,7 +4371,7 @@
                   <a:cs typeface="Circe Bold"/>
                   <a:sym typeface="Circe Bold"/>
                 </a:rPr>
-                <a:t>от 850 ₽. Доступны обеды и ужины по меню</a:t>
+                <a:t>от 950 ₽. Доступны обеды и ужины по меню</a:t>
               </a:r>
               <a:r>
                 <a:rPr lang="ru-RU" sz="1169" b="1" dirty="0">
